--- a/ppts/Advanced_Electric_Load_Demand_Forecasting_Using_AI 3 (1).pptx
+++ b/ppts/Advanced_Electric_Load_Demand_Forecasting_Using_AI 3 (1).pptx
@@ -127,6 +127,7 @@
     <p1510:client id="{1B0030DF-1CFA-734A-56B6-90EB5E934F71}" v="1785" dt="2026-07-31T19:34:05.827"/>
     <p1510:client id="{55560CAD-7B8A-AD9D-0C6B-A60D6D92E5D7}" v="1405" dt="2026-07-31T19:44:18.929"/>
     <p1510:client id="{5DAA14E2-2671-A814-B6D3-0207007E3445}" v="2" dt="2026-08-01T03:28:01.234"/>
+    <p1510:client id="{6B2008F1-51D3-1E69-ED74-F06D51A34A4A}" v="139" dt="2026-08-02T05:20:12.831"/>
     <p1510:client id="{C75EC36D-B2FF-79E0-4382-3715CF841DBE}" v="624" dt="2026-07-31T19:43:17.228"/>
     <p1510:client id="{F8B99129-CF93-BF21-A260-F0CE8BE85F4E}" v="80" dt="2026-08-01T03:45:47.223"/>
   </p1510:revLst>
@@ -1403,7 +1404,7 @@
           </a:lstStyle>
           <a:p>
             <a:fld id="{C521EDB7-0891-4E5E-8D76-2E5ECE996D38}" type="datetimeFigureOut">
-              <a:t>7/31/2026</a:t>
+              <a:t>8/1/2026</a:t>
             </a:fld>
             <a:endParaRPr lang="en-US"/>
           </a:p>
@@ -3479,7 +3480,7 @@
           <a:p>
             <a:pPr marL="0" indent="0" algn="ctr" rtl="0"/>
             <a:r>
-              <a:rPr lang="en-US" sz="1800" kern="1200">
+              <a:rPr lang="en-US" sz="1800" kern="1200" dirty="0">
                 <a:solidFill>
                   <a:schemeClr val="bg1"/>
                 </a:solidFill>
@@ -3489,7 +3490,7 @@
               </a:rPr>
               <a:t>Under The Supervision Of</a:t>
             </a:r>
-            <a:endParaRPr lang="en-US" sz="1800" kern="1200">
+            <a:endParaRPr lang="en-US" sz="1800" kern="1200" dirty="0">
               <a:solidFill>
                 <a:schemeClr val="bg1"/>
               </a:solidFill>
@@ -3500,6 +3501,16 @@
           <a:p>
             <a:pPr marL="0" algn="ctr" rtl="0"/>
             <a:r>
+              <a:rPr lang="en-US">
+                <a:solidFill>
+                  <a:schemeClr val="bg1"/>
+                </a:solidFill>
+                <a:latin typeface="Times New Roman"/>
+                <a:cs typeface="Times New Roman"/>
+              </a:rPr>
+              <a:t>Dr</a:t>
+            </a:r>
+            <a:r>
               <a:rPr lang="en-US" sz="1800" kern="1200">
                 <a:solidFill>
                   <a:schemeClr val="bg1"/>
@@ -3508,7 +3519,7 @@
                 <a:ea typeface="+mn-ea"/>
                 <a:cs typeface="Times New Roman"/>
               </a:rPr>
-              <a:t>Prof. Mamtarani Das</a:t>
+              <a:t>. Mamtarani Das</a:t>
             </a:r>
             <a:endParaRPr lang="en-US" sz="1800" kern="1200">
               <a:solidFill>
@@ -3749,7 +3760,7 @@
               <a:buChar char="•"/>
             </a:pPr>
             <a:r>
-              <a:rPr lang="en-US" sz="1400" b="1" dirty="0">
+              <a:rPr lang="en-US" sz="1400" b="1">
                 <a:solidFill>
                   <a:srgbClr val="000000"/>
                 </a:solidFill>
@@ -3760,7 +3771,7 @@
               <a:t>Moving Beyond Black Boxes:</a:t>
             </a:r>
             <a:r>
-              <a:rPr lang="en-US" sz="1400" dirty="0">
+              <a:rPr lang="en-US" sz="1400">
                 <a:solidFill>
                   <a:srgbClr val="000000"/>
                 </a:solidFill>
@@ -3771,7 +3782,7 @@
               <a:t> Implemented SHAP </a:t>
             </a:r>
             <a:r>
-              <a:rPr lang="en-US" sz="1400" dirty="0" err="1">
+              <a:rPr lang="en-US" sz="1400" err="1">
                 <a:solidFill>
                   <a:srgbClr val="000000"/>
                 </a:solidFill>
@@ -3782,7 +3793,7 @@
               <a:t>TreeExplainer</a:t>
             </a:r>
             <a:r>
-              <a:rPr lang="en-US" sz="1400" dirty="0">
+              <a:rPr lang="en-US" sz="1400">
                 <a:solidFill>
                   <a:srgbClr val="000000"/>
                 </a:solidFill>
@@ -3793,7 +3804,7 @@
               <a:t> to provide mathematically rigorous, game-theoretic transparency to the </a:t>
             </a:r>
             <a:r>
-              <a:rPr lang="en-US" sz="1400" dirty="0" err="1">
+              <a:rPr lang="en-US" sz="1400" err="1">
                 <a:solidFill>
                   <a:srgbClr val="000000"/>
                 </a:solidFill>
@@ -3804,7 +3815,7 @@
               <a:t>XGBoost</a:t>
             </a:r>
             <a:r>
-              <a:rPr lang="en-US" sz="1400" dirty="0">
+              <a:rPr lang="en-US" sz="1400">
                 <a:solidFill>
                   <a:srgbClr val="000000"/>
                 </a:solidFill>
@@ -3814,7 +3825,7 @@
               </a:rPr>
               <a:t> model. </a:t>
             </a:r>
-            <a:endParaRPr lang="en-US" sz="1400" dirty="0">
+            <a:endParaRPr lang="en-US" sz="1400">
               <a:solidFill>
                 <a:srgbClr val="000000"/>
               </a:solidFill>
@@ -3828,7 +3839,7 @@
               <a:buFont typeface=""/>
               <a:buChar char="•"/>
             </a:pPr>
-            <a:endParaRPr lang="en-US" sz="1400" dirty="0">
+            <a:endParaRPr lang="en-US" sz="1400">
               <a:solidFill>
                 <a:srgbClr val="000000"/>
               </a:solidFill>
@@ -3843,7 +3854,7 @@
               <a:buChar char="•"/>
             </a:pPr>
             <a:r>
-              <a:rPr lang="en-US" sz="1400" b="1" dirty="0">
+              <a:rPr lang="en-US" sz="1400" b="1">
                 <a:solidFill>
                   <a:srgbClr val="000000"/>
                 </a:solidFill>
@@ -3854,7 +3865,7 @@
               <a:t>Global Feature Importance:</a:t>
             </a:r>
             <a:r>
-              <a:rPr lang="en-US" sz="1400" dirty="0">
+              <a:rPr lang="en-US" sz="1400">
                 <a:solidFill>
                   <a:srgbClr val="000000"/>
                 </a:solidFill>
@@ -3865,7 +3876,7 @@
               <a:t> The SHAP summary </a:t>
             </a:r>
             <a:r>
-              <a:rPr lang="en-US" sz="1400" dirty="0" err="1">
+              <a:rPr lang="en-US" sz="1400" err="1">
                 <a:solidFill>
                   <a:srgbClr val="000000"/>
                 </a:solidFill>
@@ -3876,7 +3887,7 @@
               <a:t>beeswarm</a:t>
             </a:r>
             <a:r>
-              <a:rPr lang="en-US" sz="1400" dirty="0">
+              <a:rPr lang="en-US" sz="1400">
                 <a:solidFill>
                   <a:srgbClr val="000000"/>
                 </a:solidFill>
@@ -3892,7 +3903,7 @@
               <a:buFont typeface=""/>
               <a:buChar char="•"/>
             </a:pPr>
-            <a:endParaRPr lang="en-US" sz="1400" dirty="0">
+            <a:endParaRPr lang="en-US" sz="1400">
               <a:solidFill>
                 <a:srgbClr val="000000"/>
               </a:solidFill>
@@ -3907,7 +3918,7 @@
               <a:buChar char="•"/>
             </a:pPr>
             <a:r>
-              <a:rPr lang="en-US" sz="1400" b="1" dirty="0">
+              <a:rPr lang="en-US" sz="1400" b="1">
                 <a:solidFill>
                   <a:srgbClr val="000000"/>
                 </a:solidFill>
@@ -3918,7 +3929,7 @@
               <a:t>Local Interactions:</a:t>
             </a:r>
             <a:r>
-              <a:rPr lang="en-US" sz="1400" dirty="0">
+              <a:rPr lang="en-US" sz="1400">
                 <a:solidFill>
                   <a:srgbClr val="000000"/>
                 </a:solidFill>
@@ -3929,7 +3940,7 @@
               <a:t> Dependence plots reveal non-linear interactions, such as how the relationship between yesterday's load (Lag_24) and today's prediction shifts depending on the specific </a:t>
             </a:r>
             <a:r>
-              <a:rPr lang="en-US" sz="1400" dirty="0" err="1">
+              <a:rPr lang="en-US" sz="1400" err="1">
                 <a:solidFill>
                   <a:srgbClr val="000000"/>
                 </a:solidFill>
@@ -3940,7 +3951,7 @@
               <a:t>Hourof</a:t>
             </a:r>
             <a:r>
-              <a:rPr lang="en-US" sz="1400" dirty="0">
+              <a:rPr lang="en-US" sz="1400">
                 <a:solidFill>
                   <a:srgbClr val="000000"/>
                 </a:solidFill>
@@ -4392,7 +4403,7 @@
               <a:buFont typeface="Arial"/>
               <a:buChar char="•"/>
             </a:pPr>
-            <a:endParaRPr lang="en-US" sz="1600" dirty="0">
+            <a:endParaRPr lang="en-US" sz="1600">
               <a:solidFill>
                 <a:srgbClr val="000000"/>
               </a:solidFill>
@@ -4407,7 +4418,7 @@
               <a:buChar char="•"/>
             </a:pPr>
             <a:r>
-              <a:rPr lang="en-US" sz="1600" b="1" dirty="0">
+              <a:rPr lang="en-US" sz="1600" b="1">
                 <a:solidFill>
                   <a:srgbClr val="000000"/>
                 </a:solidFill>
@@ -4418,7 +4429,7 @@
               <a:t>Sliding Window:</a:t>
             </a:r>
             <a:r>
-              <a:rPr lang="en-US" sz="1600" dirty="0">
+              <a:rPr lang="en-US" sz="1600">
                 <a:solidFill>
                   <a:srgbClr val="000000"/>
                 </a:solidFill>
@@ -4429,7 +4440,7 @@
               <a:t> Input data was scaled via </a:t>
             </a:r>
             <a:r>
-              <a:rPr lang="en-US" sz="1600" dirty="0" err="1">
+              <a:rPr lang="en-US" sz="1600" err="1">
                 <a:solidFill>
                   <a:srgbClr val="000000"/>
                 </a:solidFill>
@@ -4440,7 +4451,7 @@
               <a:t>MinMaxScaler</a:t>
             </a:r>
             <a:r>
-              <a:rPr lang="en-US" sz="1600" dirty="0">
+              <a:rPr lang="en-US" sz="1600">
                 <a:solidFill>
                   <a:srgbClr val="000000"/>
                 </a:solidFill>
@@ -4450,7 +4461,7 @@
               </a:rPr>
               <a:t> and reshaped into 168-hour (7-day) lookback sequences. </a:t>
             </a:r>
-            <a:endParaRPr lang="en-US" sz="1600" dirty="0">
+            <a:endParaRPr lang="en-US" sz="1600">
               <a:solidFill>
                 <a:srgbClr val="000000"/>
               </a:solidFill>
@@ -4463,7 +4474,7 @@
               <a:buFont typeface="Arial"/>
               <a:buChar char="•"/>
             </a:pPr>
-            <a:endParaRPr lang="en-US" sz="1600" dirty="0">
+            <a:endParaRPr lang="en-US" sz="1600">
               <a:solidFill>
                 <a:srgbClr val="000000"/>
               </a:solidFill>
@@ -4573,7 +4584,7 @@
               <a:buFont typeface="Arial"/>
               <a:buChar char="•"/>
             </a:pPr>
-            <a:endParaRPr lang="en-US" sz="1600" dirty="0">
+            <a:endParaRPr lang="en-US" sz="1600">
               <a:solidFill>
                 <a:srgbClr val="000000"/>
               </a:solidFill>
@@ -4588,7 +4599,7 @@
               <a:buChar char="•"/>
             </a:pPr>
             <a:r>
-              <a:rPr lang="en-US" sz="1600" b="1" dirty="0">
+              <a:rPr lang="en-US" sz="1600" b="1">
                 <a:solidFill>
                   <a:srgbClr val="000000"/>
                 </a:solidFill>
@@ -4599,7 +4610,7 @@
               <a:t>Regularization:</a:t>
             </a:r>
             <a:r>
-              <a:rPr lang="en-US" sz="1600" dirty="0">
+              <a:rPr lang="en-US" sz="1600">
                 <a:solidFill>
                   <a:srgbClr val="000000"/>
                 </a:solidFill>
@@ -4610,7 +4621,7 @@
               <a:t> Utilized </a:t>
             </a:r>
             <a:r>
-              <a:rPr lang="en-US" sz="1600" dirty="0" err="1">
+              <a:rPr lang="en-US" sz="1600" err="1">
                 <a:solidFill>
                   <a:srgbClr val="000000"/>
                 </a:solidFill>
@@ -4621,7 +4632,7 @@
               <a:t>EarlyStopping</a:t>
             </a:r>
             <a:r>
-              <a:rPr lang="en-US" sz="1600" dirty="0">
+              <a:rPr lang="en-US" sz="1600">
                 <a:solidFill>
                   <a:srgbClr val="000000"/>
                 </a:solidFill>
@@ -4632,7 +4643,7 @@
               <a:t> (patience=5) and </a:t>
             </a:r>
             <a:r>
-              <a:rPr lang="en-US" sz="1600" dirty="0" err="1">
+              <a:rPr lang="en-US" sz="1600" err="1">
                 <a:solidFill>
                   <a:srgbClr val="000000"/>
                 </a:solidFill>
@@ -4643,7 +4654,7 @@
               <a:t>ReduceLROnPlateau</a:t>
             </a:r>
             <a:r>
-              <a:rPr lang="en-US" sz="1600" dirty="0">
+              <a:rPr lang="en-US" sz="1600">
                 <a:solidFill>
                   <a:srgbClr val="000000"/>
                 </a:solidFill>
@@ -4653,7 +4664,7 @@
               </a:rPr>
               <a:t> callbacks to prevent overfitting and ensure stable convergence. </a:t>
             </a:r>
-            <a:endParaRPr lang="en-US" sz="1600" dirty="0">
+            <a:endParaRPr lang="en-US" sz="1600">
               <a:solidFill>
                 <a:srgbClr val="000000"/>
               </a:solidFill>
@@ -6063,7 +6074,7 @@
                         <a:buNone/>
                       </a:pPr>
                       <a:r>
-                        <a:rPr lang="en-US" sz="1050" b="0" i="0" u="none" strike="noStrike" noProof="0" dirty="0" err="1">
+                        <a:rPr lang="en-US" sz="1050" b="0" i="0" u="none" strike="noStrike" noProof="0" err="1">
                           <a:solidFill>
                             <a:srgbClr val="17293B"/>
                           </a:solidFill>
@@ -6071,14 +6082,14 @@
                         <a:t>XGBoost</a:t>
                       </a:r>
                       <a:r>
-                        <a:rPr lang="en-US" sz="1050" b="0" i="0" u="none" strike="noStrike" noProof="0" dirty="0">
+                        <a:rPr lang="en-US" sz="1050" b="0" i="0" u="none" strike="noStrike" noProof="0">
                           <a:solidFill>
                             <a:srgbClr val="17293B"/>
                           </a:solidFill>
                         </a:rPr>
                         <a:t> (Default)</a:t>
                       </a:r>
-                      <a:endParaRPr lang="en-US" dirty="0"/>
+                      <a:endParaRPr lang="en-US"/>
                     </a:p>
                   </a:txBody>
                   <a:tcPr anchor="ctr">
@@ -6322,7 +6333,7 @@
                         <a:buNone/>
                       </a:pPr>
                       <a:r>
-                        <a:rPr lang="en-US" sz="1050" b="0" i="0" u="none" strike="noStrike" noProof="0" dirty="0" err="1">
+                        <a:rPr lang="en-US" sz="1050" b="0" i="0" u="none" strike="noStrike" noProof="0" err="1">
                           <a:solidFill>
                             <a:srgbClr val="17293B"/>
                           </a:solidFill>
@@ -6330,7 +6341,7 @@
                         <a:t>XGBoost</a:t>
                       </a:r>
                       <a:r>
-                        <a:rPr lang="en-US" sz="1050" b="0" i="0" u="none" strike="noStrike" noProof="0" dirty="0">
+                        <a:rPr lang="en-US" sz="1050" b="0" i="0" u="none" strike="noStrike" noProof="0">
                           <a:solidFill>
                             <a:srgbClr val="17293B"/>
                           </a:solidFill>
@@ -6338,7 +6349,7 @@
                         <a:t> (</a:t>
                       </a:r>
                       <a:r>
-                        <a:rPr lang="en-US" sz="1050" b="0" i="0" u="none" strike="noStrike" noProof="0" dirty="0" err="1">
+                        <a:rPr lang="en-US" sz="1050" b="0" i="0" u="none" strike="noStrike" noProof="0" err="1">
                           <a:solidFill>
                             <a:srgbClr val="17293B"/>
                           </a:solidFill>
@@ -6346,14 +6357,14 @@
                         <a:t>Optuna</a:t>
                       </a:r>
                       <a:r>
-                        <a:rPr lang="en-US" sz="1050" b="0" i="0" u="none" strike="noStrike" noProof="0" dirty="0">
+                        <a:rPr lang="en-US" sz="1050" b="0" i="0" u="none" strike="noStrike" noProof="0">
                           <a:solidFill>
                             <a:srgbClr val="17293B"/>
                           </a:solidFill>
                         </a:rPr>
                         <a:t> Tuned)</a:t>
                       </a:r>
-                      <a:endParaRPr lang="en-US" dirty="0"/>
+                      <a:endParaRPr lang="en-US"/>
                     </a:p>
                   </a:txBody>
                   <a:tcPr anchor="ctr">
@@ -6928,35 +6939,35 @@
               <a:buChar char="•"/>
             </a:pPr>
             <a:r>
-              <a:rPr lang="en-US" sz="1500" b="1" dirty="0" err="1">
+              <a:rPr lang="en-US" sz="1500" b="1" err="1">
                 <a:latin typeface="Times New Roman"/>
                 <a:cs typeface="Times New Roman"/>
               </a:rPr>
               <a:t>XGBoost</a:t>
             </a:r>
             <a:r>
-              <a:rPr lang="en-US" sz="1500" b="1" dirty="0">
+              <a:rPr lang="en-US" sz="1500" b="1">
                 <a:latin typeface="Times New Roman"/>
                 <a:cs typeface="Times New Roman"/>
               </a:rPr>
               <a:t> (</a:t>
             </a:r>
             <a:r>
-              <a:rPr lang="en-US" sz="1500" b="1" dirty="0" err="1">
+              <a:rPr lang="en-US" sz="1500" b="1" err="1">
                 <a:latin typeface="Times New Roman"/>
                 <a:cs typeface="Times New Roman"/>
               </a:rPr>
               <a:t>Optuna</a:t>
             </a:r>
             <a:r>
-              <a:rPr lang="en-US" sz="1500" b="1" dirty="0">
+              <a:rPr lang="en-US" sz="1500" b="1">
                 <a:latin typeface="Times New Roman"/>
                 <a:cs typeface="Times New Roman"/>
               </a:rPr>
               <a:t> Tuned)</a:t>
             </a:r>
             <a:r>
-              <a:rPr lang="en-US" sz="1500" dirty="0">
+              <a:rPr lang="en-US" sz="1500">
                 <a:latin typeface="Times New Roman"/>
                 <a:cs typeface="Times New Roman"/>
               </a:rPr>
@@ -7086,28 +7097,28 @@
               <a:buChar char="•"/>
             </a:pPr>
             <a:r>
-              <a:rPr lang="en-US" sz="1500" dirty="0" err="1">
+              <a:rPr lang="en-US" sz="1500" err="1">
                 <a:latin typeface="Times New Roman"/>
                 <a:cs typeface="Times New Roman"/>
               </a:rPr>
               <a:t>Optuna</a:t>
             </a:r>
             <a:r>
-              <a:rPr lang="en-US" sz="1500" dirty="0">
+              <a:rPr lang="en-US" sz="1500">
                 <a:latin typeface="Times New Roman"/>
                 <a:cs typeface="Times New Roman"/>
               </a:rPr>
               <a:t> tuning improved </a:t>
             </a:r>
             <a:r>
-              <a:rPr lang="en-US" sz="1500" dirty="0" err="1">
+              <a:rPr lang="en-US" sz="1500" err="1">
                 <a:latin typeface="Times New Roman"/>
                 <a:cs typeface="Times New Roman"/>
               </a:rPr>
               <a:t>XGBoost's</a:t>
             </a:r>
             <a:r>
-              <a:rPr lang="en-US" sz="1500" dirty="0">
+              <a:rPr lang="en-US" sz="1500">
                 <a:latin typeface="Times New Roman"/>
                 <a:cs typeface="Times New Roman"/>
               </a:rPr>
@@ -7960,7 +7971,7 @@
               <a:buChar char="▪"/>
             </a:pPr>
             <a:r>
-              <a:rPr lang="en-US" sz="1600">
+              <a:rPr lang="en-US" sz="1600" dirty="0">
                 <a:solidFill>
                   <a:srgbClr val="000000"/>
                 </a:solidFill>
@@ -7971,7 +7982,7 @@
               <a:t>[4] A. </a:t>
             </a:r>
             <a:r>
-              <a:rPr lang="en-US" sz="1600" err="1">
+              <a:rPr lang="en-US" sz="1600" dirty="0" err="1">
                 <a:solidFill>
                   <a:srgbClr val="000000"/>
                 </a:solidFill>
@@ -7982,7 +7993,7 @@
               <a:t>Estebsari</a:t>
             </a:r>
             <a:r>
-              <a:rPr lang="en-US" sz="1600">
+              <a:rPr lang="en-US" sz="1600" dirty="0">
                 <a:solidFill>
                   <a:srgbClr val="000000"/>
                 </a:solidFill>
@@ -8002,7 +8013,7 @@
               <a:buChar char="▪"/>
             </a:pPr>
             <a:r>
-              <a:rPr lang="en-US" sz="1600">
+              <a:rPr lang="en-US" sz="1600" dirty="0">
                 <a:solidFill>
                   <a:srgbClr val="000000"/>
                 </a:solidFill>
@@ -8013,7 +8024,7 @@
               <a:t>[5] O. M. Neda, "Hybrid LSTM-</a:t>
             </a:r>
             <a:r>
-              <a:rPr lang="en-US" sz="1600" err="1">
+              <a:rPr lang="en-US" sz="1600" dirty="0" err="1">
                 <a:solidFill>
                   <a:srgbClr val="000000"/>
                 </a:solidFill>
@@ -8024,7 +8035,7 @@
               <a:t>XGBoost</a:t>
             </a:r>
             <a:r>
-              <a:rPr lang="en-US" sz="1600">
+              <a:rPr lang="en-US" sz="1600" dirty="0">
                 <a:solidFill>
                   <a:srgbClr val="000000"/>
                 </a:solidFill>
@@ -8065,7 +8076,7 @@
               <a:buChar char="•"/>
             </a:pPr>
             <a:r>
-              <a:rPr lang="en-US" sz="1600">
+              <a:rPr lang="en-US" sz="1600" dirty="0">
                 <a:solidFill>
                   <a:srgbClr val="000000"/>
                 </a:solidFill>
@@ -8073,10 +8084,10 @@
                 <a:ea typeface="Calibri"/>
                 <a:cs typeface="Times New Roman"/>
               </a:rPr>
-              <a:t>[9] X. M. Zhang et al., "Forecasting Residential Energy Consumption: Single </a:t>
-            </a:r>
-            <a:r>
-              <a:rPr lang="en-US" sz="1600" err="1">
+              <a:t>[7] X. M. Zhang et al., "Forecasting Residential Energy Consumption: Single </a:t>
+            </a:r>
+            <a:r>
+              <a:rPr lang="en-US" sz="1600" dirty="0" err="1">
                 <a:solidFill>
                   <a:srgbClr val="000000"/>
                 </a:solidFill>
@@ -8087,7 +8098,7 @@
               <a:t>HouseholdPerspective</a:t>
             </a:r>
             <a:r>
-              <a:rPr lang="en-US" sz="1600">
+              <a:rPr lang="en-US" sz="1600" dirty="0">
                 <a:solidFill>
                   <a:srgbClr val="000000"/>
                 </a:solidFill>
@@ -8107,7 +8118,7 @@
               <a:buChar char="•"/>
             </a:pPr>
             <a:r>
-              <a:rPr lang="en-US" sz="1600">
+              <a:rPr lang="en-US" sz="1600" dirty="0">
                 <a:solidFill>
                   <a:srgbClr val="000000"/>
                 </a:solidFill>
@@ -8115,10 +8126,10 @@
                 <a:ea typeface="Calibri"/>
                 <a:cs typeface="Times New Roman"/>
               </a:rPr>
-              <a:t>[10] R. Rajabi and A. </a:t>
-            </a:r>
-            <a:r>
-              <a:rPr lang="en-US" sz="1600" err="1">
+              <a:t>[8] R. Rajabi and A. </a:t>
+            </a:r>
+            <a:r>
+              <a:rPr lang="en-US" sz="1600" dirty="0" err="1">
                 <a:solidFill>
                   <a:srgbClr val="000000"/>
                 </a:solidFill>
@@ -8129,7 +8140,7 @@
               <a:t>Estebsari</a:t>
             </a:r>
             <a:r>
-              <a:rPr lang="en-US" sz="1600">
+              <a:rPr lang="en-US" sz="1600" dirty="0">
                 <a:solidFill>
                   <a:srgbClr val="000000"/>
                 </a:solidFill>
@@ -8140,7 +8151,7 @@
               <a:t>, "Deep Learning Based Forecasting of Residential Loads </a:t>
             </a:r>
             <a:r>
-              <a:rPr lang="en-US" sz="1600" err="1">
+              <a:rPr lang="en-US" sz="1600" dirty="0" err="1">
                 <a:solidFill>
                   <a:srgbClr val="000000"/>
                 </a:solidFill>
@@ -8151,7 +8162,7 @@
               <a:t>UsingRecurrence</a:t>
             </a:r>
             <a:r>
-              <a:rPr lang="en-US" sz="1600">
+              <a:rPr lang="en-US" sz="1600" dirty="0">
                 <a:solidFill>
                   <a:srgbClr val="000000"/>
                 </a:solidFill>
@@ -8162,7 +8173,7 @@
               <a:t> Plots," Proc. IEEE Milan </a:t>
             </a:r>
             <a:r>
-              <a:rPr lang="en-US" sz="1600" err="1">
+              <a:rPr lang="en-US" sz="1600" dirty="0" err="1">
                 <a:solidFill>
                   <a:srgbClr val="000000"/>
                 </a:solidFill>
@@ -8173,7 +8184,7 @@
               <a:t>PowerTech</a:t>
             </a:r>
             <a:r>
-              <a:rPr lang="en-US" sz="1600">
+              <a:rPr lang="en-US" sz="1600" dirty="0">
                 <a:solidFill>
                   <a:srgbClr val="000000"/>
                 </a:solidFill>
@@ -8193,7 +8204,7 @@
               <a:buChar char="•"/>
             </a:pPr>
             <a:r>
-              <a:rPr lang="en-US" sz="1600">
+              <a:rPr lang="en-US" sz="1600" dirty="0">
                 <a:solidFill>
                   <a:srgbClr val="000000"/>
                 </a:solidFill>
@@ -8201,10 +8212,10 @@
                 <a:ea typeface="Calibri"/>
                 <a:cs typeface="Times New Roman"/>
               </a:rPr>
-              <a:t>[19] L. Li, K. Jamieson, G. DeSalvo, A. Rostamizadeh, and A. Talwalkar, "Hyperband: </a:t>
-            </a:r>
-            <a:r>
-              <a:rPr lang="en-US" sz="1600" err="1">
+              <a:t>[9] L. Li, K. Jamieson, G. DeSalvo, A. Rostamizadeh, and A. Talwalkar, "Hyperband: </a:t>
+            </a:r>
+            <a:r>
+              <a:rPr lang="en-US" sz="1600" dirty="0" err="1">
                 <a:solidFill>
                   <a:srgbClr val="000000"/>
                 </a:solidFill>
@@ -8215,7 +8226,7 @@
               <a:t>ANovel</a:t>
             </a:r>
             <a:r>
-              <a:rPr lang="en-US" sz="1600">
+              <a:rPr lang="en-US" sz="1600" dirty="0">
                 <a:solidFill>
                   <a:srgbClr val="000000"/>
                 </a:solidFill>
@@ -8415,10 +8426,10 @@
       </p:sp>
       <p:sp>
         <p:nvSpPr>
-          <p:cNvPr id="5" name="TextBox 4">
+          <p:cNvPr id="6" name="TextBox 5">
             <a:extLst>
               <a:ext uri="{FF2B5EF4-FFF2-40B4-BE49-F238E27FC236}">
-                <a16:creationId xmlns:a16="http://schemas.microsoft.com/office/drawing/2014/main" id="{F87D9AD9-3B2B-724F-9D8F-B88D504BC617}"/>
+                <a16:creationId xmlns:a16="http://schemas.microsoft.com/office/drawing/2014/main" id="{B1ACDD90-6E19-F095-7334-703491A80C35}"/>
               </a:ext>
             </a:extLst>
           </p:cNvPr>
@@ -8427,8 +8438,8 @@
         </p:nvSpPr>
         <p:spPr>
           <a:xfrm>
-            <a:off x="699370" y="1310014"/>
-            <a:ext cx="10928958" cy="5262979"/>
+            <a:off x="689919" y="1544594"/>
+            <a:ext cx="6096000" cy="4524315"/>
           </a:xfrm>
           <a:prstGeom prst="rect">
             <a:avLst/>
@@ -8444,320 +8455,175 @@
           </a:bodyPr>
           <a:lstStyle/>
           <a:p>
-            <a:pPr marL="285750" indent="-285750">
+            <a:pPr marL="342900" indent="-342900">
               <a:buFont typeface="Arial" panose="020B0604020202020204" pitchFamily="34" charset="0"/>
               <a:buChar char="•"/>
             </a:pPr>
             <a:r>
-              <a:rPr lang="en-US" sz="1600" b="1">
-                <a:solidFill>
-                  <a:srgbClr val="000000"/>
-                </a:solidFill>
-                <a:latin typeface="Times New Roman"/>
-                <a:ea typeface="+mn-lt"/>
+              <a:rPr lang="en-US" sz="2400">
+                <a:latin typeface="Times New Roman"/>
                 <a:cs typeface="Times New Roman"/>
               </a:rPr>
               <a:t>Problem Statement</a:t>
             </a:r>
-            <a:br>
-              <a:rPr lang="en-US" sz="1600">
-                <a:solidFill>
-                  <a:srgbClr val="000000"/>
-                </a:solidFill>
-                <a:latin typeface="Times New Roman"/>
-                <a:ea typeface="+mn-lt"/>
-                <a:cs typeface="Times New Roman"/>
-              </a:rPr>
-            </a:br>
-            <a:r>
-              <a:rPr lang="en-US" sz="1600">
-                <a:solidFill>
-                  <a:srgbClr val="000000"/>
-                </a:solidFill>
-                <a:latin typeface="Times New Roman"/>
-                <a:ea typeface="+mn-lt"/>
-                <a:cs typeface="Times New Roman"/>
-              </a:rPr>
-              <a:t> Improve electricity load forecasting by reducing errors caused by noise, outliers, and changing demand patterns. </a:t>
-            </a:r>
-          </a:p>
-          <a:p>
-            <a:pPr marL="285750" indent="-285750">
-              <a:buFont typeface="Arial"/>
-              <a:buChar char="•"/>
-            </a:pPr>
-            <a:endParaRPr lang="en-US" sz="1600">
-              <a:solidFill>
-                <a:srgbClr val="000000"/>
-              </a:solidFill>
-              <a:latin typeface="Times New Roman"/>
-              <a:ea typeface="+mn-lt"/>
-              <a:cs typeface="Times New Roman"/>
-            </a:endParaRPr>
-          </a:p>
-          <a:p>
-            <a:pPr marL="285750" indent="-285750">
-              <a:buFont typeface="Arial" panose="020B0604020202020204" pitchFamily="34" charset="0"/>
-              <a:buChar char="•"/>
-            </a:pPr>
-            <a:r>
-              <a:rPr lang="en-US" sz="1600" b="1">
-                <a:solidFill>
-                  <a:srgbClr val="000000"/>
-                </a:solidFill>
-                <a:latin typeface="Times New Roman"/>
-                <a:ea typeface="+mn-lt"/>
-                <a:cs typeface="Times New Roman"/>
-              </a:rPr>
-              <a:t>Literature Review</a:t>
-            </a:r>
-            <a:br>
-              <a:rPr lang="en-US" sz="1600" b="1">
-                <a:solidFill>
-                  <a:srgbClr val="000000"/>
-                </a:solidFill>
-                <a:latin typeface="Times New Roman"/>
-                <a:ea typeface="+mn-lt"/>
-                <a:cs typeface="Times New Roman"/>
-              </a:rPr>
-            </a:br>
-            <a:r>
-              <a:rPr lang="en-US" sz="1600">
-                <a:solidFill>
-                  <a:srgbClr val="000000"/>
-                </a:solidFill>
-                <a:latin typeface="Times New Roman"/>
-                <a:ea typeface="+mn-lt"/>
-                <a:cs typeface="Times New Roman"/>
-              </a:rPr>
-              <a:t> Review recent machine learning and deep learning approaches for short-term electricity load forecasting and identify their strengths and limitations. </a:t>
-            </a:r>
-          </a:p>
-          <a:p>
-            <a:pPr marL="285750" indent="-285750">
-              <a:buFont typeface="Arial" panose="020B0604020202020204" pitchFamily="34" charset="0"/>
-              <a:buChar char="•"/>
-            </a:pPr>
-            <a:endParaRPr lang="en-US" sz="1600">
-              <a:solidFill>
-                <a:srgbClr val="000000"/>
-              </a:solidFill>
-              <a:latin typeface="Times New Roman"/>
-              <a:ea typeface="+mn-lt"/>
-              <a:cs typeface="Times New Roman"/>
-            </a:endParaRPr>
-          </a:p>
-          <a:p>
-            <a:pPr marL="285750" indent="-285750">
-              <a:buFont typeface="Arial" panose="020B0604020202020204" pitchFamily="34" charset="0"/>
-              <a:buChar char="•"/>
-            </a:pPr>
-            <a:r>
-              <a:rPr lang="en-US" sz="1600" b="1">
-                <a:solidFill>
-                  <a:srgbClr val="000000"/>
-                </a:solidFill>
-                <a:latin typeface="Times New Roman"/>
-                <a:ea typeface="+mn-lt"/>
-                <a:cs typeface="Times New Roman"/>
-              </a:rPr>
-              <a:t>Research Gap</a:t>
-            </a:r>
-            <a:br>
-              <a:rPr lang="en-US" sz="1600">
-                <a:solidFill>
-                  <a:srgbClr val="000000"/>
-                </a:solidFill>
-                <a:latin typeface="Times New Roman"/>
-                <a:ea typeface="+mn-lt"/>
-                <a:cs typeface="Times New Roman"/>
-              </a:rPr>
-            </a:br>
-            <a:r>
-              <a:rPr lang="en-US" sz="1600">
-                <a:solidFill>
-                  <a:srgbClr val="000000"/>
-                </a:solidFill>
-                <a:latin typeface="Times New Roman"/>
-                <a:ea typeface="+mn-lt"/>
-                <a:cs typeface="Times New Roman"/>
-              </a:rPr>
-              <a:t> Existing methods have limited preprocessing, manual tuning, and are tested on limited datasets. </a:t>
-            </a:r>
-          </a:p>
-          <a:p>
-            <a:pPr marL="285750" indent="-285750">
-              <a:buFont typeface="Arial"/>
-              <a:buChar char="•"/>
-            </a:pPr>
-            <a:endParaRPr lang="en-US" sz="1600">
-              <a:solidFill>
-                <a:srgbClr val="000000"/>
-              </a:solidFill>
-              <a:latin typeface="Times New Roman"/>
-              <a:ea typeface="+mn-lt"/>
-              <a:cs typeface="Times New Roman"/>
-            </a:endParaRPr>
-          </a:p>
-          <a:p>
-            <a:pPr marL="285750" indent="-285750">
-              <a:buFont typeface="Arial" panose="020B0604020202020204" pitchFamily="34" charset="0"/>
-              <a:buChar char="•"/>
-            </a:pPr>
-            <a:r>
-              <a:rPr lang="en-US" sz="1600" b="1">
-                <a:solidFill>
-                  <a:srgbClr val="000000"/>
-                </a:solidFill>
-                <a:latin typeface="Times New Roman"/>
-                <a:ea typeface="+mn-lt"/>
-                <a:cs typeface="Times New Roman"/>
-              </a:rPr>
-              <a:t>Proposed Methodology</a:t>
-            </a:r>
-            <a:br>
-              <a:rPr lang="en-US" sz="1600">
-                <a:solidFill>
-                  <a:srgbClr val="000000"/>
-                </a:solidFill>
-                <a:latin typeface="Times New Roman"/>
-                <a:ea typeface="+mn-lt"/>
-                <a:cs typeface="Times New Roman"/>
-              </a:rPr>
-            </a:br>
-            <a:r>
-              <a:rPr lang="en-US" sz="1600">
-                <a:solidFill>
-                  <a:srgbClr val="000000"/>
-                </a:solidFill>
-                <a:latin typeface="Times New Roman"/>
-                <a:ea typeface="+mn-lt"/>
-                <a:cs typeface="Times New Roman"/>
-              </a:rPr>
-              <a:t> Build a hybrid model using FFT denoising, LOF outlier removal, RP/GAF encoding, and a Hyperband-tuned CNN-LSTM Autoencoder. </a:t>
-            </a:r>
-          </a:p>
-          <a:p>
-            <a:pPr marL="285750" indent="-285750">
-              <a:buFont typeface="Arial"/>
-              <a:buChar char="•"/>
-            </a:pPr>
-            <a:endParaRPr lang="en-US" sz="1600">
-              <a:solidFill>
-                <a:srgbClr val="000000"/>
-              </a:solidFill>
-              <a:latin typeface="Times New Roman"/>
-              <a:ea typeface="+mn-lt"/>
-              <a:cs typeface="Times New Roman"/>
-            </a:endParaRPr>
-          </a:p>
-          <a:p>
-            <a:pPr marL="285750" indent="-285750">
-              <a:buFont typeface="Arial" panose="020B0604020202020204" pitchFamily="34" charset="0"/>
-              <a:buChar char="•"/>
-            </a:pPr>
-            <a:r>
-              <a:rPr lang="en-US" sz="1600" b="1">
-                <a:solidFill>
-                  <a:srgbClr val="000000"/>
-                </a:solidFill>
-                <a:latin typeface="Times New Roman"/>
-                <a:ea typeface="+mn-lt"/>
-                <a:cs typeface="Times New Roman"/>
-              </a:rPr>
-              <a:t>Results &amp; Evaluation</a:t>
-            </a:r>
-            <a:br>
-              <a:rPr lang="en-US" sz="1600">
-                <a:solidFill>
-                  <a:srgbClr val="000000"/>
-                </a:solidFill>
-                <a:latin typeface="Times New Roman"/>
-                <a:ea typeface="+mn-lt"/>
-                <a:cs typeface="Times New Roman"/>
-              </a:rPr>
-            </a:br>
-            <a:r>
-              <a:rPr lang="en-US" sz="1600">
-                <a:solidFill>
-                  <a:srgbClr val="000000"/>
-                </a:solidFill>
-                <a:latin typeface="Times New Roman"/>
-                <a:ea typeface="+mn-lt"/>
-                <a:cs typeface="Times New Roman"/>
-              </a:rPr>
-              <a:t> Compare the proposed model with ARIMA, SVM, ANN, and 1D-CNN using five performance metrics across three datasets. </a:t>
-            </a:r>
-          </a:p>
-          <a:p>
-            <a:pPr marL="285750" indent="-285750">
-              <a:buFont typeface="Arial"/>
-              <a:buChar char="•"/>
-            </a:pPr>
-            <a:endParaRPr lang="en-US" sz="1600">
-              <a:solidFill>
-                <a:srgbClr val="000000"/>
-              </a:solidFill>
-              <a:latin typeface="Times New Roman"/>
-              <a:ea typeface="+mn-lt"/>
-              <a:cs typeface="Times New Roman"/>
-            </a:endParaRPr>
-          </a:p>
-          <a:p>
-            <a:pPr marL="285750" indent="-285750">
-              <a:buFont typeface="Arial" panose="020B0604020202020204" pitchFamily="34" charset="0"/>
-              <a:buChar char="•"/>
-            </a:pPr>
-            <a:r>
-              <a:rPr lang="en-US" sz="1600" b="1">
-                <a:solidFill>
-                  <a:srgbClr val="000000"/>
-                </a:solidFill>
-                <a:latin typeface="Times New Roman"/>
-                <a:ea typeface="+mn-lt"/>
-                <a:cs typeface="Times New Roman"/>
-              </a:rPr>
-              <a:t>Conclusion &amp; Future Work</a:t>
-            </a:r>
-            <a:br>
-              <a:rPr lang="en-US" sz="1600">
-                <a:solidFill>
-                  <a:srgbClr val="000000"/>
-                </a:solidFill>
-                <a:latin typeface="Times New Roman"/>
-                <a:ea typeface="+mn-lt"/>
-                <a:cs typeface="Times New Roman"/>
-              </a:rPr>
-            </a:br>
-            <a:r>
-              <a:rPr lang="en-US" sz="1600">
-                <a:solidFill>
-                  <a:srgbClr val="000000"/>
-                </a:solidFill>
-                <a:latin typeface="Times New Roman"/>
-                <a:ea typeface="+mn-lt"/>
-                <a:cs typeface="Times New Roman"/>
-              </a:rPr>
-              <a:t> Achieve more accurate forecasting and explore Transformers, probabilistic forecasting, and real-time deployment in future work. </a:t>
-            </a:r>
-            <a:endParaRPr lang="en-US" sz="1600">
-              <a:solidFill>
-                <a:srgbClr val="000000"/>
-              </a:solidFill>
+            <a:endParaRPr lang="en-US">
               <a:latin typeface="Times New Roman"/>
               <a:cs typeface="Times New Roman"/>
             </a:endParaRPr>
           </a:p>
           <a:p>
-            <a:pPr marL="285750" indent="-285750">
+            <a:pPr marL="342900" indent="-342900">
               <a:buFont typeface="Arial" panose="020B0604020202020204" pitchFamily="34" charset="0"/>
               <a:buChar char="•"/>
             </a:pPr>
-            <a:endParaRPr lang="en-US" sz="1600">
-              <a:solidFill>
-                <a:srgbClr val="000000"/>
-              </a:solidFill>
+            <a:endParaRPr lang="en-US" sz="2400" dirty="0">
               <a:latin typeface="Times New Roman"/>
+              <a:ea typeface="Calibri" panose="020F0502020204030204"/>
+              <a:cs typeface="Times New Roman"/>
+            </a:endParaRPr>
+          </a:p>
+          <a:p>
+            <a:pPr marL="342900" indent="-342900">
+              <a:buFont typeface="Arial" panose="020B0604020202020204" pitchFamily="34" charset="0"/>
+              <a:buChar char="•"/>
+            </a:pPr>
+            <a:r>
+              <a:rPr lang="en-US" sz="2400">
+                <a:latin typeface="Times New Roman"/>
+                <a:cs typeface="Times New Roman"/>
+              </a:rPr>
+              <a:t>Literature Review</a:t>
+            </a:r>
+            <a:endParaRPr lang="en-US" sz="2400">
+              <a:latin typeface="Times New Roman"/>
+              <a:ea typeface="Calibri" panose="020F0502020204030204"/>
+              <a:cs typeface="Times New Roman"/>
+            </a:endParaRPr>
+          </a:p>
+          <a:p>
+            <a:pPr marL="342900" indent="-342900">
+              <a:buFont typeface="Arial" panose="020B0604020202020204" pitchFamily="34" charset="0"/>
+              <a:buChar char="•"/>
+            </a:pPr>
+            <a:endParaRPr lang="en-US" sz="2400" dirty="0">
+              <a:latin typeface="Times New Roman"/>
+              <a:ea typeface="Calibri" panose="020F0502020204030204"/>
+              <a:cs typeface="Times New Roman"/>
+            </a:endParaRPr>
+          </a:p>
+          <a:p>
+            <a:pPr marL="342900" indent="-342900">
+              <a:buFont typeface="Arial" panose="020B0604020202020204" pitchFamily="34" charset="0"/>
+              <a:buChar char="•"/>
+            </a:pPr>
+            <a:r>
+              <a:rPr lang="en-US" sz="2400">
+                <a:latin typeface="Times New Roman"/>
+                <a:cs typeface="Times New Roman"/>
+              </a:rPr>
+              <a:t>Research Gap</a:t>
+            </a:r>
+            <a:endParaRPr lang="en-US" sz="2400">
+              <a:latin typeface="Times New Roman"/>
+              <a:ea typeface="Calibri" panose="020F0502020204030204"/>
+              <a:cs typeface="Times New Roman"/>
+            </a:endParaRPr>
+          </a:p>
+          <a:p>
+            <a:pPr marL="342900" indent="-342900">
+              <a:buFont typeface="Arial" panose="020B0604020202020204" pitchFamily="34" charset="0"/>
+              <a:buChar char="•"/>
+            </a:pPr>
+            <a:endParaRPr lang="en-US" sz="2400" dirty="0">
+              <a:latin typeface="Times New Roman"/>
+              <a:ea typeface="Calibri" panose="020F0502020204030204"/>
+              <a:cs typeface="Times New Roman"/>
+            </a:endParaRPr>
+          </a:p>
+          <a:p>
+            <a:pPr marL="342900" indent="-342900">
+              <a:buFont typeface="Arial" panose="020B0604020202020204" pitchFamily="34" charset="0"/>
+              <a:buChar char="•"/>
+            </a:pPr>
+            <a:r>
+              <a:rPr lang="en-US" sz="2400">
+                <a:latin typeface="Times New Roman"/>
+                <a:cs typeface="Times New Roman"/>
+              </a:rPr>
+              <a:t>Proposed Methodology</a:t>
+            </a:r>
+            <a:endParaRPr lang="en-US" sz="2400">
+              <a:latin typeface="Times New Roman"/>
+              <a:ea typeface="Calibri" panose="020F0502020204030204"/>
+              <a:cs typeface="Times New Roman"/>
+            </a:endParaRPr>
+          </a:p>
+          <a:p>
+            <a:pPr marL="342900" indent="-342900">
+              <a:buFont typeface="Arial" panose="020B0604020202020204" pitchFamily="34" charset="0"/>
+              <a:buChar char="•"/>
+            </a:pPr>
+            <a:endParaRPr lang="en-US" sz="2400" dirty="0">
+              <a:latin typeface="Times New Roman"/>
+              <a:ea typeface="Calibri" panose="020F0502020204030204"/>
+              <a:cs typeface="Times New Roman"/>
+            </a:endParaRPr>
+          </a:p>
+          <a:p>
+            <a:pPr marL="342900" indent="-342900">
+              <a:buFont typeface="Arial" panose="020B0604020202020204" pitchFamily="34" charset="0"/>
+              <a:buChar char="•"/>
+            </a:pPr>
+            <a:r>
+              <a:rPr lang="en-US" sz="2400">
+                <a:latin typeface="Times New Roman"/>
+                <a:cs typeface="Times New Roman"/>
+              </a:rPr>
+              <a:t>Results &amp; Evaluation</a:t>
+            </a:r>
+            <a:endParaRPr lang="en-US" sz="2400">
+              <a:latin typeface="Times New Roman"/>
+              <a:ea typeface="Calibri" panose="020F0502020204030204"/>
+              <a:cs typeface="Times New Roman"/>
+            </a:endParaRPr>
+          </a:p>
+          <a:p>
+            <a:pPr marL="342900" indent="-342900">
+              <a:buFont typeface="Arial" panose="020B0604020202020204" pitchFamily="34" charset="0"/>
+              <a:buChar char="•"/>
+            </a:pPr>
+            <a:endParaRPr lang="en-US" sz="2400" dirty="0">
+              <a:latin typeface="Times New Roman"/>
+              <a:ea typeface="Calibri" panose="020F0502020204030204"/>
+              <a:cs typeface="Times New Roman"/>
+            </a:endParaRPr>
+          </a:p>
+          <a:p>
+            <a:pPr marL="342900" indent="-342900">
+              <a:buFont typeface="Arial" panose="020B0604020202020204" pitchFamily="34" charset="0"/>
+              <a:buChar char="•"/>
+            </a:pPr>
+            <a:r>
+              <a:rPr lang="en-US" sz="2400">
+                <a:latin typeface="Times New Roman"/>
+                <a:cs typeface="Times New Roman"/>
+              </a:rPr>
+              <a:t>Conclusion &amp; Future Work</a:t>
+            </a:r>
+            <a:endParaRPr lang="en-US" sz="2400">
+              <a:latin typeface="Times New Roman"/>
+              <a:ea typeface="Calibri" panose="020F0502020204030204"/>
+              <a:cs typeface="Times New Roman"/>
+            </a:endParaRPr>
+          </a:p>
+          <a:p>
+            <a:pPr marL="342900" indent="-342900" algn="ctr">
+              <a:buFont typeface="Arial" panose="020B0604020202020204" pitchFamily="34" charset="0"/>
+              <a:buChar char="•"/>
+            </a:pPr>
+            <a:endParaRPr lang="en-US" sz="2400">
+              <a:latin typeface="Times New Roman"/>
+              <a:ea typeface="Calibri" panose="020F0502020204030204"/>
               <a:cs typeface="Times New Roman"/>
             </a:endParaRPr>
           </a:p>
@@ -8874,8 +8740,8 @@
         </p:nvSpPr>
         <p:spPr>
           <a:xfrm>
-            <a:off x="710513" y="1462216"/>
-            <a:ext cx="10410567" cy="4524315"/>
+            <a:off x="556054" y="1421027"/>
+            <a:ext cx="11203458" cy="4524315"/>
           </a:xfrm>
           <a:prstGeom prst="rect">
             <a:avLst/>
@@ -8990,7 +8856,29 @@
                 <a:ea typeface="+mn-lt"/>
                 <a:cs typeface="Times New Roman"/>
               </a:rPr>
-              <a:t>Conventional methods struggle with noise, outliers, and changing demand patterns. </a:t>
+              <a:t>Methods such as </a:t>
+            </a:r>
+            <a:r>
+              <a:rPr lang="en-US" b="1">
+                <a:solidFill>
+                  <a:srgbClr val="000000"/>
+                </a:solidFill>
+                <a:latin typeface="Times New Roman"/>
+                <a:ea typeface="+mn-lt"/>
+                <a:cs typeface="Times New Roman"/>
+              </a:rPr>
+              <a:t>ARIMA, SVM, ANN</a:t>
+            </a:r>
+            <a:r>
+              <a:rPr lang="en-US">
+                <a:solidFill>
+                  <a:srgbClr val="000000"/>
+                </a:solidFill>
+                <a:latin typeface="Times New Roman"/>
+                <a:ea typeface="+mn-lt"/>
+                <a:cs typeface="Times New Roman"/>
+              </a:rPr>
+              <a:t> struggle with noise, outliers, &amp; changing demand patterns.</a:t>
             </a:r>
           </a:p>
           <a:p>
@@ -9007,7 +8895,7 @@
                 <a:ea typeface="+mn-lt"/>
                 <a:cs typeface="Times New Roman"/>
               </a:rPr>
-              <a:t>This reduces prediction accuracy and forecast reliability. </a:t>
+              <a:t>This reduces prediction accuracy and reliability. </a:t>
             </a:r>
           </a:p>
           <a:p>
@@ -9033,15 +8921,40 @@
                 <a:latin typeface="Times New Roman"/>
                 <a:cs typeface="Times New Roman"/>
               </a:rPr>
-              <a:t>3) Impact of Inaccurate Forecasting</a:t>
-            </a:r>
-            <a:endParaRPr lang="en-US">
-              <a:solidFill>
-                <a:srgbClr val="000000"/>
-              </a:solidFill>
-              <a:latin typeface="Times New Roman"/>
-              <a:cs typeface="Times New Roman"/>
-            </a:endParaRPr>
+              <a:t>3) </a:t>
+            </a:r>
+            <a:r>
+              <a:rPr lang="en-US" b="1">
+                <a:solidFill>
+                  <a:srgbClr val="000000"/>
+                </a:solidFill>
+                <a:latin typeface="Times New Roman"/>
+                <a:ea typeface="+mn-lt"/>
+                <a:cs typeface="Times New Roman"/>
+              </a:rPr>
+              <a:t>Impact of  Imprecise</a:t>
+            </a:r>
+            <a:r>
+              <a:rPr lang="en-US">
+                <a:solidFill>
+                  <a:srgbClr val="000000"/>
+                </a:solidFill>
+                <a:ea typeface="+mn-lt"/>
+                <a:cs typeface="+mn-lt"/>
+              </a:rPr>
+              <a:t> </a:t>
+            </a:r>
+            <a:r>
+              <a:rPr lang="en-US" b="1">
+                <a:solidFill>
+                  <a:srgbClr val="000000"/>
+                </a:solidFill>
+                <a:latin typeface="Times New Roman"/>
+                <a:ea typeface="+mn-lt"/>
+                <a:cs typeface="Times New Roman"/>
+              </a:rPr>
+              <a:t>Forecasting</a:t>
+            </a:r>
           </a:p>
           <a:p>
             <a:pPr marL="285750" indent="-285750">
@@ -9287,7 +9200,7 @@
           <p:nvPr>
             <p:extLst>
               <p:ext uri="{D42A27DB-BD31-4B8C-83A1-F6EECF244321}">
-                <p14:modId xmlns:p14="http://schemas.microsoft.com/office/powerpoint/2010/main" val="3580286687"/>
+                <p14:modId xmlns:p14="http://schemas.microsoft.com/office/powerpoint/2010/main" val="3790736575"/>
               </p:ext>
             </p:extLst>
           </p:nvPr>
@@ -9542,27 +9455,27 @@
                         <a:buNone/>
                       </a:pPr>
                       <a:r>
-                        <a:rPr lang="en-US" sz="1600" b="0" i="0" u="none" strike="noStrike" noProof="0" dirty="0">
+                        <a:rPr lang="en-US" sz="1600" b="0" i="0" u="none" strike="noStrike" noProof="0">
                           <a:latin typeface="Times New Roman"/>
                           <a:cs typeface="Times New Roman"/>
                         </a:rPr>
                         <a:t>• Demonstrates substantial error reduction using Tree-structured </a:t>
                       </a:r>
                       <a:r>
-                        <a:rPr lang="en-US" sz="1600" b="0" i="0" u="none" strike="noStrike" noProof="0" dirty="0" err="1">
+                        <a:rPr lang="en-US" sz="1600" b="0" i="0" u="none" strike="noStrike" noProof="0" err="1">
                           <a:latin typeface="Times New Roman"/>
                           <a:cs typeface="Times New Roman"/>
                         </a:rPr>
                         <a:t>Parzen</a:t>
                       </a:r>
                       <a:r>
-                        <a:rPr lang="en-US" sz="1600" b="0" i="0" u="none" strike="noStrike" noProof="0" dirty="0">
+                        <a:rPr lang="en-US" sz="1600" b="0" i="0" u="none" strike="noStrike" noProof="0">
                           <a:latin typeface="Times New Roman"/>
                           <a:cs typeface="Times New Roman"/>
                         </a:rPr>
                         <a:t> Estimator (TPE) over grid search.</a:t>
                       </a:r>
-                      <a:endParaRPr lang="en-US" dirty="0">
+                      <a:endParaRPr lang="en-US">
                         <a:latin typeface="Times New Roman"/>
                         <a:cs typeface="Times New Roman"/>
                       </a:endParaRPr>
@@ -11150,14 +11063,14 @@
           <p:nvPr>
             <p:extLst>
               <p:ext uri="{D42A27DB-BD31-4B8C-83A1-F6EECF244321}">
-                <p14:modId xmlns:p14="http://schemas.microsoft.com/office/powerpoint/2010/main" val="1728890456"/>
+                <p14:modId xmlns:p14="http://schemas.microsoft.com/office/powerpoint/2010/main" val="2116223861"/>
               </p:ext>
             </p:extLst>
           </p:nvPr>
         </p:nvGraphicFramePr>
         <p:xfrm>
           <a:off x="6919783" y="4097913"/>
-          <a:ext cx="4415436" cy="1737360"/>
+          <a:ext cx="4415436" cy="2011680"/>
         </p:xfrm>
         <a:graphic>
           <a:graphicData uri="http://schemas.openxmlformats.org/drawingml/2006/table">
@@ -11194,11 +11107,14 @@
                     <a:bodyPr/>
                     <a:lstStyle/>
                     <a:p>
-                      <a:pPr>
+                      <a:pPr algn="ctr">
                         <a:buNone/>
                       </a:pPr>
                       <a:r>
-                        <a:rPr lang="en-US"/>
+                        <a:rPr lang="en-US" sz="1800">
+                          <a:latin typeface="Times New Roman"/>
+                          <a:cs typeface="Times New Roman"/>
+                        </a:rPr>
                         <a:t>Dataset</a:t>
                       </a:r>
                     </a:p>
@@ -11217,11 +11133,14 @@
                     <a:bodyPr/>
                     <a:lstStyle/>
                     <a:p>
-                      <a:pPr>
+                      <a:pPr algn="ctr">
                         <a:buNone/>
                       </a:pPr>
                       <a:r>
-                        <a:rPr lang="en-US"/>
+                        <a:rPr lang="en-US" sz="1800">
+                          <a:latin typeface="Times New Roman"/>
+                          <a:cs typeface="Times New Roman"/>
+                        </a:rPr>
                         <a:t>Records</a:t>
                       </a:r>
                     </a:p>
@@ -11240,11 +11159,14 @@
                     <a:bodyPr/>
                     <a:lstStyle/>
                     <a:p>
-                      <a:pPr>
+                      <a:pPr algn="ctr">
                         <a:buNone/>
                       </a:pPr>
                       <a:r>
-                        <a:rPr lang="en-US"/>
+                        <a:rPr lang="en-US" sz="1800">
+                          <a:latin typeface="Times New Roman"/>
+                          <a:cs typeface="Times New Roman"/>
+                        </a:rPr>
                         <a:t>Frequency</a:t>
                       </a:r>
                     </a:p>
@@ -11270,11 +11192,14 @@
                     <a:bodyPr/>
                     <a:lstStyle/>
                     <a:p>
-                      <a:pPr>
+                      <a:pPr algn="ctr">
                         <a:buNone/>
                       </a:pPr>
                       <a:r>
-                        <a:rPr lang="en-US"/>
+                        <a:rPr lang="en-US" sz="1800">
+                          <a:latin typeface="Times New Roman"/>
+                          <a:cs typeface="Times New Roman"/>
+                        </a:rPr>
                         <a:t>PJME Hourly</a:t>
                       </a:r>
                     </a:p>
@@ -11286,11 +11211,14 @@
                     <a:bodyPr/>
                     <a:lstStyle/>
                     <a:p>
-                      <a:pPr>
+                      <a:pPr algn="ctr">
                         <a:buNone/>
                       </a:pPr>
                       <a:r>
-                        <a:rPr lang="en-US"/>
+                        <a:rPr lang="en-US" sz="1800">
+                          <a:latin typeface="Times New Roman"/>
+                          <a:cs typeface="Times New Roman"/>
+                        </a:rPr>
                         <a:t>145K+</a:t>
                       </a:r>
                     </a:p>
@@ -11302,11 +11230,14 @@
                     <a:bodyPr/>
                     <a:lstStyle/>
                     <a:p>
-                      <a:pPr>
+                      <a:pPr algn="ctr">
                         <a:buNone/>
                       </a:pPr>
                       <a:r>
-                        <a:rPr lang="en-US"/>
+                        <a:rPr lang="en-US" sz="1800">
+                          <a:latin typeface="Times New Roman"/>
+                          <a:cs typeface="Times New Roman"/>
+                        </a:rPr>
                         <a:t>Hourly</a:t>
                       </a:r>
                     </a:p>
@@ -11325,11 +11256,14 @@
                     <a:bodyPr/>
                     <a:lstStyle/>
                     <a:p>
-                      <a:pPr>
+                      <a:pPr algn="ctr">
                         <a:buNone/>
                       </a:pPr>
                       <a:r>
-                        <a:rPr lang="en-US"/>
+                        <a:rPr lang="en-US" sz="1800">
+                          <a:latin typeface="Times New Roman"/>
+                          <a:cs typeface="Times New Roman"/>
+                        </a:rPr>
                         <a:t>India Elec</a:t>
                       </a:r>
                     </a:p>
@@ -11341,11 +11275,14 @@
                     <a:bodyPr/>
                     <a:lstStyle/>
                     <a:p>
-                      <a:pPr>
+                      <a:pPr algn="ctr">
                         <a:buNone/>
                       </a:pPr>
                       <a:r>
-                        <a:rPr lang="en-US"/>
+                        <a:rPr lang="en-US" sz="1800">
+                          <a:latin typeface="Times New Roman"/>
+                          <a:cs typeface="Times New Roman"/>
+                        </a:rPr>
                         <a:t>69K+</a:t>
                       </a:r>
                     </a:p>
@@ -11357,11 +11294,14 @@
                     <a:bodyPr/>
                     <a:lstStyle/>
                     <a:p>
-                      <a:pPr>
+                      <a:pPr algn="ctr">
                         <a:buNone/>
                       </a:pPr>
                       <a:r>
-                        <a:rPr lang="en-US"/>
+                        <a:rPr lang="en-US" sz="1800">
+                          <a:latin typeface="Times New Roman"/>
+                          <a:cs typeface="Times New Roman"/>
+                        </a:rPr>
                         <a:t>Daily</a:t>
                       </a:r>
                     </a:p>
@@ -11380,11 +11320,14 @@
                     <a:bodyPr/>
                     <a:lstStyle/>
                     <a:p>
-                      <a:pPr>
+                      <a:pPr algn="ctr">
                         <a:buNone/>
                       </a:pPr>
                       <a:r>
-                        <a:rPr lang="en-US"/>
+                        <a:rPr lang="en-US" sz="1800">
+                          <a:latin typeface="Times New Roman"/>
+                          <a:cs typeface="Times New Roman"/>
+                        </a:rPr>
                         <a:t>Building Energy</a:t>
                       </a:r>
                     </a:p>
@@ -11396,11 +11339,14 @@
                     <a:bodyPr/>
                     <a:lstStyle/>
                     <a:p>
-                      <a:pPr>
+                      <a:pPr algn="ctr">
                         <a:buNone/>
                       </a:pPr>
                       <a:r>
-                        <a:rPr lang="en-US"/>
+                        <a:rPr lang="en-US" sz="1800">
+                          <a:latin typeface="Times New Roman"/>
+                          <a:cs typeface="Times New Roman"/>
+                        </a:rPr>
                         <a:t>5K+</a:t>
                       </a:r>
                     </a:p>
@@ -11412,11 +11358,14 @@
                     <a:bodyPr/>
                     <a:lstStyle/>
                     <a:p>
-                      <a:pPr>
+                      <a:pPr algn="ctr">
                         <a:buNone/>
                       </a:pPr>
                       <a:r>
-                        <a:rPr lang="en-US"/>
+                        <a:rPr lang="en-US" sz="1800">
+                          <a:latin typeface="Times New Roman"/>
+                          <a:cs typeface="Times New Roman"/>
+                        </a:rPr>
                         <a:t>Hourly</a:t>
                       </a:r>
                     </a:p>
@@ -12293,16 +12242,6 @@
               <a:t>Lag-1, Lag-24, and Lag-168</a:t>
             </a:r>
             <a:r>
-              <a:rPr lang="en-US" sz="1700" dirty="0">
-                <a:solidFill>
-                  <a:srgbClr val="000000"/>
-                </a:solidFill>
-                <a:latin typeface="Times New Roman"/>
-                <a:cs typeface="Times New Roman"/>
-              </a:rPr>
-              <a:t> </a:t>
-            </a:r>
-            <a:r>
               <a:rPr lang="en-US" sz="1700">
                 <a:solidFill>
                   <a:srgbClr val="000000"/>
@@ -12310,7 +12249,7 @@
                 <a:latin typeface="Times New Roman"/>
                 <a:cs typeface="Times New Roman"/>
               </a:rPr>
-              <a:t>to use previous hour, daily, &amp; weekly consumption history.</a:t>
+              <a:t> to use previous hour, daily, &amp; weekly consumption history.</a:t>
             </a:r>
           </a:p>
           <a:p>
